--- a/cursos/recursos/estrategia-y-tactica/02-horquillas-de-caballo-y-de-peon.pptx
+++ b/cursos/recursos/estrategia-y-tactica/02-horquillas-de-caballo-y-de-peon.pptx
@@ -1287,7 +1287,7 @@
                 <a:ea typeface="Cambria" pitchFamily="34" charset="-122"/>
                 <a:cs typeface="Cambria" pitchFamily="34" charset="-120"/>
               </a:rPr>
-              <a:t>Horquillas de caballo y de peón</a:t>
+              <a:t>Tenedores de caballo y de peón</a:t>
             </a:r>
             <a:endParaRPr lang="en-US" sz="4000" dirty="0"/>
           </a:p>
@@ -1534,7 +1534,7 @@
                 <a:ea typeface="Cambria" pitchFamily="34" charset="-122"/>
                 <a:cs typeface="Cambria" pitchFamily="34" charset="-120"/>
               </a:rPr>
-              <a:t>Horquillas de caballo y de peón</a:t>
+              <a:t>Tenedores de caballo y de peón</a:t>
             </a:r>
             <a:endParaRPr lang="en-US" sz="2600" dirty="0"/>
           </a:p>
@@ -1602,7 +1602,7 @@
                 <a:ea typeface="Calibri" pitchFamily="34" charset="-122"/>
                 <a:cs typeface="Calibri" pitchFamily="34" charset="-120"/>
               </a:rPr>
-              <a:t>Una horquilla ataca dos piezas a la vez desde una sola casilla.</a:t>
+              <a:t>Un tenedor ataca dos piezas a la vez desde una sola casilla.</a:t>
             </a:r>
             <a:endParaRPr lang="en-US" sz="1600" dirty="0"/>
           </a:p>
@@ -1650,7 +1650,7 @@
                 <a:ea typeface="Calibri" pitchFamily="34" charset="-122"/>
                 <a:cs typeface="Calibri" pitchFamily="34" charset="-120"/>
               </a:rPr>
-              <a:t>Los peones también hacen horquillas simples atacando en diagonal a dos piezas alineadas.</a:t>
+              <a:t>Los peones también hacen tenedores simples atacando en diagonal a dos piezas alineadas.</a:t>
             </a:r>
             <a:endParaRPr lang="en-US" sz="1600" dirty="0"/>
           </a:p>
@@ -1864,7 +1864,7 @@
                 <a:ea typeface="Cambria" pitchFamily="34" charset="-122"/>
                 <a:cs typeface="Cambria" pitchFamily="34" charset="-120"/>
               </a:rPr>
-              <a:t>revisa el artículo "Horquillas de caballo" y busca 5 posiciones donde un peón haga una horquilla.</a:t>
+              <a:t>revisa el artículo "Tenedores de caballo" y busca 5 posiciones donde un peón haga un tenedor.</a:t>
             </a:r>
             <a:endParaRPr lang="en-US" sz="2200" dirty="0"/>
           </a:p>
